--- a/documents/Basic presentation.pptx
+++ b/documents/Basic presentation.pptx
@@ -196,7 +196,7 @@
           <a:p>
             <a:fld id="{1EBEDD12-BCD5-485B-BCBC-34BB01D7923C}" type="datetimeFigureOut">
               <a:rPr lang="en-US" smtClean="0"/>
-              <a:t>6/16/2024</a:t>
+              <a:t>5/18/2024</a:t>
             </a:fld>
             <a:endParaRPr lang="en-US" dirty="0"/>
           </a:p>
@@ -410,7 +410,7 @@
           <a:p>
             <a:fld id="{6EE7A52F-9D89-7442-A8E9-48D1527B5F6B}" type="datetimeFigureOut">
               <a:rPr lang="en-US" smtClean="0"/>
-              <a:t>6/16/2024</a:t>
+              <a:t>5/18/2024</a:t>
             </a:fld>
             <a:endParaRPr lang="en-US" dirty="0"/>
           </a:p>
@@ -9950,11 +9950,11 @@
           <a:p>
             <a:r>
               <a:rPr lang="en-US" dirty="0"/>
-              <a:t>The Information Security Assessment report, conducted by Securance Consulting and presented to the Legislative Audit Committee, evaluates the security practices of the Governor’s Office of Information Technology (OIT) and the Judicial Branch. The audit aims to identify security vulnerabilities and provide recommendations for improvement to ensure the confidentiality, integrity, and availability of </a:t>
-            </a:r>
-            <a:r>
-              <a:rPr lang="en-US"/>
-              <a:t>state-managed information</a:t>
+              <a:t>The Information Security Assessment report, conducted by Securance Consulting and presented to the Legislative Audit Committee, evaluates the security practices of the Governor’s Office of Information Technology (OIT) and the Judicial Branch. The audit aims to identify security vulnerabilities and provide recommendations for improvement to ensure the confidentiality, integrity, and availability of state-managed </a:t>
+            </a:r>
+            <a:r>
+              <a:rPr lang="en-US" dirty="0" err="1"/>
+              <a:t>informatio</a:t>
             </a:r>
             <a:endParaRPr lang="en-US" dirty="0"/>
           </a:p>
@@ -11633,6 +11633,35 @@
 </file>
 
 <file path=customXml/item1.xml><?xml version="1.0" encoding="utf-8"?>
+<p:properties xmlns:p="http://schemas.microsoft.com/office/2006/metadata/properties" xmlns:xsi="http://www.w3.org/2001/XMLSchema-instance" xmlns:pc="http://schemas.microsoft.com/office/infopath/2007/PartnerControls">
+  <documentManagement>
+    <Background xmlns="71af3243-3dd4-4a8d-8c0d-dd76da1f02a5">false</Background>
+    <Status xmlns="71af3243-3dd4-4a8d-8c0d-dd76da1f02a5">Not started</Status>
+    <_ip_UnifiedCompliancePolicyUIAction xmlns="http://schemas.microsoft.com/sharepoint/v3" xsi:nil="true"/>
+    <Image xmlns="71af3243-3dd4-4a8d-8c0d-dd76da1f02a5">
+      <Url xsi:nil="true"/>
+      <Description xsi:nil="true"/>
+    </Image>
+    <_ip_UnifiedCompliancePolicyProperties xmlns="http://schemas.microsoft.com/sharepoint/v3" xsi:nil="true"/>
+    <ImageTagsTaxHTField xmlns="71af3243-3dd4-4a8d-8c0d-dd76da1f02a5">
+      <Terms xmlns="http://schemas.microsoft.com/office/infopath/2007/PartnerControls"/>
+    </ImageTagsTaxHTField>
+    <TaxCatchAll xmlns="230e9df3-be65-4c73-a93b-d1236ebd677e" xsi:nil="true"/>
+    <MediaServiceKeyPoints xmlns="71af3243-3dd4-4a8d-8c0d-dd76da1f02a5" xsi:nil="true"/>
+  </documentManagement>
+</p:properties>
+</file>
+
+<file path=customXml/item2.xml><?xml version="1.0" encoding="utf-8"?>
+<?mso-contentType ?>
+<FormTemplates xmlns="http://schemas.microsoft.com/sharepoint/v3/contenttype/forms">
+  <Display>DocumentLibraryForm</Display>
+  <Edit>DocumentLibraryForm</Edit>
+  <New>DocumentLibraryForm</New>
+</FormTemplates>
+</file>
+
+<file path=customXml/item3.xml><?xml version="1.0" encoding="utf-8"?>
 <ct:contentTypeSchema xmlns:ct="http://schemas.microsoft.com/office/2006/metadata/contentType" xmlns:ma="http://schemas.microsoft.com/office/2006/metadata/properties/metaAttributes" ct:_="" ma:_="" ma:contentTypeName="Document" ma:contentTypeID="0x01010079F111ED35F8CC479449609E8A0923A6" ma:contentTypeVersion="28" ma:contentTypeDescription="Create a new document." ma:contentTypeScope="" ma:versionID="60f5a4f2d2b0abadcf532d48ebf9cb71">
   <xsd:schema xmlns:xsd="http://www.w3.org/2001/XMLSchema" xmlns:xs="http://www.w3.org/2001/XMLSchema" xmlns:p="http://schemas.microsoft.com/office/2006/metadata/properties" xmlns:ns1="http://schemas.microsoft.com/sharepoint/v3" xmlns:ns2="71af3243-3dd4-4a8d-8c0d-dd76da1f02a5" xmlns:ns3="16c05727-aa75-4e4a-9b5f-8a80a1165891" xmlns:ns4="230e9df3-be65-4c73-a93b-d1236ebd677e" targetNamespace="http://schemas.microsoft.com/office/2006/metadata/properties" ma:root="true" ma:fieldsID="7dd78129e6a1811f84807ad11c651531" ns1:_="" ns2:_="" ns3:_="" ns4:_="">
     <xsd:import namespace="http://schemas.microsoft.com/sharepoint/v3"/>
@@ -11944,36 +11973,27 @@
 </ct:contentTypeSchema>
 </file>
 
-<file path=customXml/item2.xml><?xml version="1.0" encoding="utf-8"?>
-<?mso-contentType ?>
-<FormTemplates xmlns="http://schemas.microsoft.com/sharepoint/v3/contenttype/forms">
-  <Display>DocumentLibraryForm</Display>
-  <Edit>DocumentLibraryForm</Edit>
-  <New>DocumentLibraryForm</New>
-</FormTemplates>
+<file path=customXml/itemProps1.xml><?xml version="1.0" encoding="utf-8"?>
+<ds:datastoreItem xmlns:ds="http://schemas.openxmlformats.org/officeDocument/2006/customXml" ds:itemID="{4F4B194E-8B30-4377-8C59-ECFB902D2A26}">
+  <ds:schemaRefs>
+    <ds:schemaRef ds:uri="http://schemas.microsoft.com/office/2006/metadata/properties"/>
+    <ds:schemaRef ds:uri="http://schemas.microsoft.com/office/infopath/2007/PartnerControls"/>
+    <ds:schemaRef ds:uri="71af3243-3dd4-4a8d-8c0d-dd76da1f02a5"/>
+    <ds:schemaRef ds:uri="http://schemas.microsoft.com/sharepoint/v3"/>
+    <ds:schemaRef ds:uri="230e9df3-be65-4c73-a93b-d1236ebd677e"/>
+  </ds:schemaRefs>
+</ds:datastoreItem>
 </file>
 
-<file path=customXml/item3.xml><?xml version="1.0" encoding="utf-8"?>
-<p:properties xmlns:p="http://schemas.microsoft.com/office/2006/metadata/properties" xmlns:xsi="http://www.w3.org/2001/XMLSchema-instance" xmlns:pc="http://schemas.microsoft.com/office/infopath/2007/PartnerControls">
-  <documentManagement>
-    <Background xmlns="71af3243-3dd4-4a8d-8c0d-dd76da1f02a5">false</Background>
-    <Status xmlns="71af3243-3dd4-4a8d-8c0d-dd76da1f02a5">Not started</Status>
-    <_ip_UnifiedCompliancePolicyUIAction xmlns="http://schemas.microsoft.com/sharepoint/v3" xsi:nil="true"/>
-    <Image xmlns="71af3243-3dd4-4a8d-8c0d-dd76da1f02a5">
-      <Url xsi:nil="true"/>
-      <Description xsi:nil="true"/>
-    </Image>
-    <_ip_UnifiedCompliancePolicyProperties xmlns="http://schemas.microsoft.com/sharepoint/v3" xsi:nil="true"/>
-    <ImageTagsTaxHTField xmlns="71af3243-3dd4-4a8d-8c0d-dd76da1f02a5">
-      <Terms xmlns="http://schemas.microsoft.com/office/infopath/2007/PartnerControls"/>
-    </ImageTagsTaxHTField>
-    <TaxCatchAll xmlns="230e9df3-be65-4c73-a93b-d1236ebd677e" xsi:nil="true"/>
-    <MediaServiceKeyPoints xmlns="71af3243-3dd4-4a8d-8c0d-dd76da1f02a5" xsi:nil="true"/>
-  </documentManagement>
-</p:properties>
+<file path=customXml/itemProps2.xml><?xml version="1.0" encoding="utf-8"?>
+<ds:datastoreItem xmlns:ds="http://schemas.openxmlformats.org/officeDocument/2006/customXml" ds:itemID="{C21FFAC0-05A2-416A-B06C-C248395482CF}">
+  <ds:schemaRefs>
+    <ds:schemaRef ds:uri="http://schemas.microsoft.com/sharepoint/v3/contenttype/forms"/>
+  </ds:schemaRefs>
+</ds:datastoreItem>
 </file>
 
-<file path=customXml/itemProps1.xml><?xml version="1.0" encoding="utf-8"?>
+<file path=customXml/itemProps3.xml><?xml version="1.0" encoding="utf-8"?>
 <ds:datastoreItem xmlns:ds="http://schemas.openxmlformats.org/officeDocument/2006/customXml" ds:itemID="{92DB9E12-8AC3-4138-BF4D-720A5525AB10}">
   <ds:schemaRefs>
     <ds:schemaRef ds:uri="http://schemas.microsoft.com/office/2006/metadata/contentType"/>
@@ -11994,26 +12014,6 @@
 </ds:datastoreItem>
 </file>
 
-<file path=customXml/itemProps2.xml><?xml version="1.0" encoding="utf-8"?>
-<ds:datastoreItem xmlns:ds="http://schemas.openxmlformats.org/officeDocument/2006/customXml" ds:itemID="{C21FFAC0-05A2-416A-B06C-C248395482CF}">
-  <ds:schemaRefs>
-    <ds:schemaRef ds:uri="http://schemas.microsoft.com/sharepoint/v3/contenttype/forms"/>
-  </ds:schemaRefs>
-</ds:datastoreItem>
-</file>
-
-<file path=customXml/itemProps3.xml><?xml version="1.0" encoding="utf-8"?>
-<ds:datastoreItem xmlns:ds="http://schemas.openxmlformats.org/officeDocument/2006/customXml" ds:itemID="{4F4B194E-8B30-4377-8C59-ECFB902D2A26}">
-  <ds:schemaRefs>
-    <ds:schemaRef ds:uri="http://schemas.microsoft.com/office/2006/metadata/properties"/>
-    <ds:schemaRef ds:uri="http://schemas.microsoft.com/office/infopath/2007/PartnerControls"/>
-    <ds:schemaRef ds:uri="71af3243-3dd4-4a8d-8c0d-dd76da1f02a5"/>
-    <ds:schemaRef ds:uri="http://schemas.microsoft.com/sharepoint/v3"/>
-    <ds:schemaRef ds:uri="230e9df3-be65-4c73-a93b-d1236ebd677e"/>
-  </ds:schemaRefs>
-</ds:datastoreItem>
-</file>
-
 <file path=docMetadata/LabelInfo.xml><?xml version="1.0" encoding="utf-8"?>
 <clbl:labelList xmlns:clbl="http://schemas.microsoft.com/office/2020/mipLabelMetadata"/>
 </file>